--- a/topicPresentation.pptx
+++ b/topicPresentation.pptx
@@ -12,8 +12,8 @@
   <p:sldIdLst>
     <p:sldId id="283" r:id="rId4"/>
     <p:sldId id="280" r:id="rId5"/>
-    <p:sldId id="281" r:id="rId6"/>
-    <p:sldId id="284" r:id="rId7"/>
+    <p:sldId id="284" r:id="rId6"/>
+    <p:sldId id="281" r:id="rId7"/>
     <p:sldId id="288" r:id="rId8"/>
     <p:sldId id="286" r:id="rId9"/>
     <p:sldId id="287" r:id="rId10"/>
@@ -128,7 +128,8 @@
     <p1510:client id="{BB41C0A7-433C-06AA-A4BC-DA459EE7E685}" v="11" dt="2026-08-20T11:50:40.006"/>
     <p1510:client id="{BFA17408-520D-7498-6F70-3D7D5884EE3F}" v="2" dt="2026-08-20T21:03:29.109"/>
     <p1510:client id="{C6AF2ACB-5B0C-1A0E-27F3-F4BC8985762A}" v="217" dt="2026-08-20T12:57:08.199"/>
-    <p1510:client id="{E7B633C9-175A-4AB8-95ED-5787B159A645}" v="898" dt="2026-08-21T07:49:56.349"/>
+    <p1510:client id="{D0558D0C-429C-FA5E-6802-65812E4ED615}" v="64" dt="2026-08-21T08:57:00.729"/>
+    <p1510:client id="{E7B633C9-175A-4AB8-95ED-5787B159A645}" v="899" dt="2026-08-21T08:16:13.553"/>
     <p1510:client id="{F5E39279-EBA0-3BC2-585B-569B8FE32206}" v="3" dt="2026-08-20T11:56:01.239"/>
   </p1510:revLst>
 </p1510:revInfo>
@@ -2106,25 +2107,22 @@
               <a:buChar char="•"/>
             </a:pPr>
             <a:r>
-              <a:rPr lang="en-GB" sz="1600" b="1" spc="-1" noProof="0" err="1">
+              <a:rPr lang="en-GB" sz="1600" b="1" spc="-1">
                 <a:solidFill>
                   <a:srgbClr val="000000"/>
                 </a:solidFill>
                 <a:latin typeface="Arial"/>
                 <a:ea typeface="DejaVu Sans"/>
               </a:rPr>
-              <a:t>yfinance</a:t>
-            </a:r>
-            <a:r>
-              <a:rPr lang="en-GB" sz="1600" b="1" spc="-1" noProof="0">
-                <a:solidFill>
-                  <a:srgbClr val="000000"/>
-                </a:solidFill>
-                <a:latin typeface="Arial"/>
-                <a:ea typeface="DejaVu Sans"/>
-              </a:rPr>
-              <a:t> API</a:t>
-            </a:r>
+              <a:t>yfinance API</a:t>
+            </a:r>
+            <a:endParaRPr lang="en-GB" sz="1600" b="1" spc="-1" noProof="0">
+              <a:solidFill>
+                <a:srgbClr val="000000"/>
+              </a:solidFill>
+              <a:latin typeface="Arial"/>
+              <a:ea typeface="DejaVu Sans"/>
+            </a:endParaRPr>
           </a:p>
           <a:p>
             <a:pPr marL="285750" indent="-285750">
@@ -2238,7 +2236,7 @@
         </p:blipFill>
         <p:spPr>
           <a:xfrm>
-            <a:off x="5545497" y="2340267"/>
+            <a:off x="4741073" y="2340267"/>
             <a:ext cx="5247091" cy="3038297"/>
           </a:xfrm>
           <a:prstGeom prst="rect">
@@ -2287,227 +2285,6 @@
 </file>
 
 <file path=ppt/slides/slide3.xml><?xml version="1.0" encoding="utf-8"?>
-<p:sld xmlns:a="http://schemas.openxmlformats.org/drawingml/2006/main" xmlns:r="http://schemas.openxmlformats.org/officeDocument/2006/relationships" xmlns:p="http://schemas.openxmlformats.org/presentationml/2006/main">
-  <p:cSld>
-    <p:spTree>
-      <p:nvGrpSpPr>
-        <p:cNvPr id="1" name=""/>
-        <p:cNvGrpSpPr/>
-        <p:nvPr/>
-      </p:nvGrpSpPr>
-      <p:grpSpPr>
-        <a:xfrm>
-          <a:off x="0" y="0"/>
-          <a:ext cx="0" cy="0"/>
-          <a:chOff x="0" y="0"/>
-          <a:chExt cx="0" cy="0"/>
-        </a:xfrm>
-      </p:grpSpPr>
-      <p:sp>
-        <p:nvSpPr>
-          <p:cNvPr id="2" name="CustomShape 1"/>
-          <p:cNvSpPr/>
-          <p:nvPr/>
-        </p:nvSpPr>
-        <p:spPr>
-          <a:xfrm>
-            <a:off x="540000" y="2160000"/>
-            <a:ext cx="10079640" cy="3631200"/>
-          </a:xfrm>
-          <a:prstGeom prst="rect">
-            <a:avLst/>
-          </a:prstGeom>
-          <a:noFill/>
-          <a:ln>
-            <a:noFill/>
-          </a:ln>
-        </p:spPr>
-        <p:style>
-          <a:lnRef idx="0">
-            <a:scrgbClr r="0" g="0" b="0"/>
-          </a:lnRef>
-          <a:fillRef idx="0">
-            <a:scrgbClr r="0" g="0" b="0"/>
-          </a:fillRef>
-          <a:effectRef idx="0">
-            <a:scrgbClr r="0" g="0" b="0"/>
-          </a:effectRef>
-          <a:fontRef idx="minor"/>
-        </p:style>
-        <p:txBody>
-          <a:bodyPr lIns="0" tIns="0" rIns="0" bIns="0" anchor="t"/>
-          <a:lstStyle/>
-          <a:p>
-            <a:pPr marL="285750" indent="-285750">
-              <a:lnSpc>
-                <a:spcPct val="150000"/>
-              </a:lnSpc>
-              <a:buFont typeface="Arial" panose="020B0604020202020204" pitchFamily="34" charset="0"/>
-              <a:buChar char="•"/>
-            </a:pPr>
-            <a:r>
-              <a:rPr lang="en-GB" noProof="0"/>
-              <a:t>What's the impact of negative/crisis news on the 11 GICS between China or Russia and the USA, </a:t>
-            </a:r>
-            <a:r>
-              <a:rPr lang="de-DE" err="1"/>
-              <a:t>given</a:t>
-            </a:r>
-            <a:r>
-              <a:rPr lang="de-DE"/>
-              <a:t> </a:t>
-            </a:r>
-            <a:r>
-              <a:rPr lang="de-DE" err="1"/>
-              <a:t>their</a:t>
-            </a:r>
-            <a:r>
-              <a:rPr lang="de-DE"/>
-              <a:t> </a:t>
-            </a:r>
-            <a:r>
-              <a:rPr lang="de-DE" err="1"/>
-              <a:t>differing</a:t>
-            </a:r>
-            <a:r>
-              <a:rPr lang="de-DE"/>
-              <a:t> </a:t>
-            </a:r>
-            <a:r>
-              <a:rPr lang="de-DE" err="1"/>
-              <a:t>levels</a:t>
-            </a:r>
-            <a:r>
-              <a:rPr lang="de-DE"/>
-              <a:t> of press </a:t>
-            </a:r>
-            <a:r>
-              <a:rPr lang="de-DE" err="1"/>
-              <a:t>freedom</a:t>
-            </a:r>
-            <a:r>
-              <a:rPr lang="en-GB" noProof="0"/>
-              <a:t>?</a:t>
-            </a:r>
-          </a:p>
-          <a:p>
-            <a:pPr marL="285750" indent="-285750">
-              <a:lnSpc>
-                <a:spcPct val="150000"/>
-              </a:lnSpc>
-              <a:buFont typeface="Arial" panose="020B0604020202020204" pitchFamily="34" charset="0"/>
-              <a:buChar char="•"/>
-            </a:pPr>
-            <a:r>
-              <a:rPr lang="en-GB" noProof="0"/>
-              <a:t>Does the nature (positive/negative) of crisis-related news coverage predict the direction and magnitude of stock market movements?</a:t>
-            </a:r>
-          </a:p>
-          <a:p>
-            <a:pPr marL="285750" indent="-285750">
-              <a:lnSpc>
-                <a:spcPct val="150000"/>
-              </a:lnSpc>
-              <a:buFont typeface="Arial" panose="020B0604020202020204" pitchFamily="34" charset="0"/>
-              <a:buChar char="•"/>
-            </a:pPr>
-            <a:r>
-              <a:rPr lang="en-GB" noProof="0"/>
-              <a:t>How does the magnitude of the initial MOEX (</a:t>
-            </a:r>
-            <a:r>
-              <a:rPr lang="en-GB"/>
-              <a:t>Moscow Exchange</a:t>
-            </a:r>
-            <a:r>
-              <a:rPr lang="en-GB" noProof="0"/>
-              <a:t>) sector index drop following the Ukraine invasion of February 2022, compare to the equivalent DAX sector drop and does the difference correlate with the gap in press freedom scores (RSF) between Russia and Germany at that time?</a:t>
-            </a:r>
-            <a:endParaRPr lang="en-GB" sz="1600" b="0" strike="noStrike" spc="-1" noProof="0">
-              <a:latin typeface="Arial"/>
-            </a:endParaRPr>
-          </a:p>
-          <a:p>
-            <a:pPr>
-              <a:lnSpc>
-                <a:spcPct val="150000"/>
-              </a:lnSpc>
-            </a:pPr>
-            <a:endParaRPr lang="en-GB" sz="1600" b="0" strike="noStrike" spc="-1" noProof="0">
-              <a:latin typeface="Arial"/>
-            </a:endParaRPr>
-          </a:p>
-        </p:txBody>
-      </p:sp>
-      <p:sp>
-        <p:nvSpPr>
-          <p:cNvPr id="4" name="CustomShape 3"/>
-          <p:cNvSpPr/>
-          <p:nvPr/>
-        </p:nvSpPr>
-        <p:spPr>
-          <a:xfrm>
-            <a:off x="540000" y="1260000"/>
-            <a:ext cx="10079640" cy="647640"/>
-          </a:xfrm>
-          <a:prstGeom prst="rect">
-            <a:avLst/>
-          </a:prstGeom>
-          <a:noFill/>
-          <a:ln>
-            <a:noFill/>
-          </a:ln>
-        </p:spPr>
-        <p:style>
-          <a:lnRef idx="0">
-            <a:scrgbClr r="0" g="0" b="0"/>
-          </a:lnRef>
-          <a:fillRef idx="0">
-            <a:scrgbClr r="0" g="0" b="0"/>
-          </a:fillRef>
-          <a:effectRef idx="0">
-            <a:scrgbClr r="0" g="0" b="0"/>
-          </a:effectRef>
-          <a:fontRef idx="minor"/>
-        </p:style>
-        <p:txBody>
-          <a:bodyPr lIns="0" tIns="0" rIns="0" bIns="0"/>
-          <a:lstStyle/>
-          <a:p>
-            <a:pPr>
-              <a:lnSpc>
-                <a:spcPct val="100000"/>
-              </a:lnSpc>
-            </a:pPr>
-            <a:r>
-              <a:rPr lang="en-GB" sz="2800" b="1" spc="-1" noProof="0">
-                <a:solidFill>
-                  <a:srgbClr val="000000"/>
-                </a:solidFill>
-                <a:latin typeface="Arial"/>
-              </a:rPr>
-              <a:t>Research Questions </a:t>
-            </a:r>
-            <a:endParaRPr lang="en-GB" sz="2800" b="0" strike="noStrike" spc="-1" noProof="0">
-              <a:latin typeface="Arial"/>
-            </a:endParaRPr>
-          </a:p>
-        </p:txBody>
-      </p:sp>
-    </p:spTree>
-    <p:extLst>
-      <p:ext uri="{BB962C8B-B14F-4D97-AF65-F5344CB8AC3E}">
-        <p14:creationId xmlns:p14="http://schemas.microsoft.com/office/powerpoint/2010/main" val="3269156697"/>
-      </p:ext>
-    </p:extLst>
-  </p:cSld>
-  <p:clrMapOvr>
-    <a:masterClrMapping/>
-  </p:clrMapOvr>
-</p:sld>
-</file>
-
-<file path=ppt/slides/slide4.xml><?xml version="1.0" encoding="utf-8"?>
 <p:sld xmlns:a="http://schemas.openxmlformats.org/drawingml/2006/main" xmlns:r="http://schemas.openxmlformats.org/officeDocument/2006/relationships" xmlns:p="http://schemas.openxmlformats.org/presentationml/2006/main">
   <p:cSld>
     <p:spTree>
@@ -2596,12 +2373,20 @@
               <a:t>Do markets become more resistant to the impact of </a:t>
             </a:r>
             <a:r>
-              <a:rPr lang="de-DE"/>
+              <a:rPr lang="de-DE" err="1"/>
               <a:t>recurring</a:t>
             </a:r>
             <a:r>
               <a:rPr lang="en-GB" noProof="0"/>
-              <a:t> natural disasters over time, and how does the effect differ between Japan and Central Europe?</a:t>
+              <a:t> natural disasters over time, and how does the effect differ between Japan and </a:t>
+            </a:r>
+            <a:r>
+              <a:rPr lang="en-GB"/>
+              <a:t>Southern Europe</a:t>
+            </a:r>
+            <a:r>
+              <a:rPr lang="en-GB" noProof="0"/>
+              <a:t>?</a:t>
             </a:r>
           </a:p>
           <a:p>
@@ -2695,6 +2480,227 @@
     <p:extLst>
       <p:ext uri="{BB962C8B-B14F-4D97-AF65-F5344CB8AC3E}">
         <p14:creationId xmlns:p14="http://schemas.microsoft.com/office/powerpoint/2010/main" val="713480316"/>
+      </p:ext>
+    </p:extLst>
+  </p:cSld>
+  <p:clrMapOvr>
+    <a:masterClrMapping/>
+  </p:clrMapOvr>
+</p:sld>
+</file>
+
+<file path=ppt/slides/slide4.xml><?xml version="1.0" encoding="utf-8"?>
+<p:sld xmlns:a="http://schemas.openxmlformats.org/drawingml/2006/main" xmlns:r="http://schemas.openxmlformats.org/officeDocument/2006/relationships" xmlns:p="http://schemas.openxmlformats.org/presentationml/2006/main">
+  <p:cSld>
+    <p:spTree>
+      <p:nvGrpSpPr>
+        <p:cNvPr id="1" name=""/>
+        <p:cNvGrpSpPr/>
+        <p:nvPr/>
+      </p:nvGrpSpPr>
+      <p:grpSpPr>
+        <a:xfrm>
+          <a:off x="0" y="0"/>
+          <a:ext cx="0" cy="0"/>
+          <a:chOff x="0" y="0"/>
+          <a:chExt cx="0" cy="0"/>
+        </a:xfrm>
+      </p:grpSpPr>
+      <p:sp>
+        <p:nvSpPr>
+          <p:cNvPr id="2" name="CustomShape 1"/>
+          <p:cNvSpPr/>
+          <p:nvPr/>
+        </p:nvSpPr>
+        <p:spPr>
+          <a:xfrm>
+            <a:off x="540000" y="2160000"/>
+            <a:ext cx="10079640" cy="3631200"/>
+          </a:xfrm>
+          <a:prstGeom prst="rect">
+            <a:avLst/>
+          </a:prstGeom>
+          <a:noFill/>
+          <a:ln>
+            <a:noFill/>
+          </a:ln>
+        </p:spPr>
+        <p:style>
+          <a:lnRef idx="0">
+            <a:scrgbClr r="0" g="0" b="0"/>
+          </a:lnRef>
+          <a:fillRef idx="0">
+            <a:scrgbClr r="0" g="0" b="0"/>
+          </a:fillRef>
+          <a:effectRef idx="0">
+            <a:scrgbClr r="0" g="0" b="0"/>
+          </a:effectRef>
+          <a:fontRef idx="minor"/>
+        </p:style>
+        <p:txBody>
+          <a:bodyPr lIns="0" tIns="0" rIns="0" bIns="0" anchor="t"/>
+          <a:lstStyle/>
+          <a:p>
+            <a:pPr marL="285750" indent="-285750">
+              <a:lnSpc>
+                <a:spcPct val="150000"/>
+              </a:lnSpc>
+              <a:buFont typeface="Arial" panose="020B0604020202020204" pitchFamily="34" charset="0"/>
+              <a:buChar char="•"/>
+            </a:pPr>
+            <a:r>
+              <a:rPr lang="en-GB" noProof="0"/>
+              <a:t>What's the impact of negative/crisis news on the 11 GICS between China or Russia and the USA, </a:t>
+            </a:r>
+            <a:r>
+              <a:rPr lang="de-DE" err="1"/>
+              <a:t>given</a:t>
+            </a:r>
+            <a:r>
+              <a:rPr lang="de-DE"/>
+              <a:t> </a:t>
+            </a:r>
+            <a:r>
+              <a:rPr lang="de-DE" err="1"/>
+              <a:t>their</a:t>
+            </a:r>
+            <a:r>
+              <a:rPr lang="de-DE"/>
+              <a:t> </a:t>
+            </a:r>
+            <a:r>
+              <a:rPr lang="de-DE" err="1"/>
+              <a:t>differing</a:t>
+            </a:r>
+            <a:r>
+              <a:rPr lang="de-DE"/>
+              <a:t> </a:t>
+            </a:r>
+            <a:r>
+              <a:rPr lang="de-DE" err="1"/>
+              <a:t>levels</a:t>
+            </a:r>
+            <a:r>
+              <a:rPr lang="de-DE"/>
+              <a:t> of press </a:t>
+            </a:r>
+            <a:r>
+              <a:rPr lang="de-DE" err="1"/>
+              <a:t>freedom</a:t>
+            </a:r>
+            <a:r>
+              <a:rPr lang="en-GB" noProof="0"/>
+              <a:t>?</a:t>
+            </a:r>
+          </a:p>
+          <a:p>
+            <a:pPr marL="285750" indent="-285750">
+              <a:lnSpc>
+                <a:spcPct val="150000"/>
+              </a:lnSpc>
+              <a:buFont typeface="Arial" panose="020B0604020202020204" pitchFamily="34" charset="0"/>
+              <a:buChar char="•"/>
+            </a:pPr>
+            <a:r>
+              <a:rPr lang="en-GB" noProof="0"/>
+              <a:t>Does the nature (positive/negative) of crisis-related news coverage predict the direction and magnitude of stock market movements?</a:t>
+            </a:r>
+          </a:p>
+          <a:p>
+            <a:pPr marL="285750" indent="-285750">
+              <a:lnSpc>
+                <a:spcPct val="150000"/>
+              </a:lnSpc>
+              <a:buFont typeface="Arial" panose="020B0604020202020204" pitchFamily="34" charset="0"/>
+              <a:buChar char="•"/>
+            </a:pPr>
+            <a:r>
+              <a:rPr lang="en-GB" noProof="0"/>
+              <a:t>How does the magnitude of the initial MOEX (</a:t>
+            </a:r>
+            <a:r>
+              <a:rPr lang="en-GB"/>
+              <a:t>Moscow Exchange</a:t>
+            </a:r>
+            <a:r>
+              <a:rPr lang="en-GB" noProof="0"/>
+              <a:t>) sector index drop following the Ukraine invasion of February 2022, compare to the equivalent DAX sector drop and does the difference correlate with the gap in press freedom scores (RSF) between Russia and Germany at that time?</a:t>
+            </a:r>
+            <a:endParaRPr lang="en-GB" sz="1600" b="0" strike="noStrike" spc="-1" noProof="0">
+              <a:latin typeface="Arial"/>
+            </a:endParaRPr>
+          </a:p>
+          <a:p>
+            <a:pPr>
+              <a:lnSpc>
+                <a:spcPct val="150000"/>
+              </a:lnSpc>
+            </a:pPr>
+            <a:endParaRPr lang="en-GB" sz="1600" b="0" strike="noStrike" spc="-1" noProof="0">
+              <a:latin typeface="Arial"/>
+            </a:endParaRPr>
+          </a:p>
+        </p:txBody>
+      </p:sp>
+      <p:sp>
+        <p:nvSpPr>
+          <p:cNvPr id="4" name="CustomShape 3"/>
+          <p:cNvSpPr/>
+          <p:nvPr/>
+        </p:nvSpPr>
+        <p:spPr>
+          <a:xfrm>
+            <a:off x="540000" y="1260000"/>
+            <a:ext cx="10079640" cy="647640"/>
+          </a:xfrm>
+          <a:prstGeom prst="rect">
+            <a:avLst/>
+          </a:prstGeom>
+          <a:noFill/>
+          <a:ln>
+            <a:noFill/>
+          </a:ln>
+        </p:spPr>
+        <p:style>
+          <a:lnRef idx="0">
+            <a:scrgbClr r="0" g="0" b="0"/>
+          </a:lnRef>
+          <a:fillRef idx="0">
+            <a:scrgbClr r="0" g="0" b="0"/>
+          </a:fillRef>
+          <a:effectRef idx="0">
+            <a:scrgbClr r="0" g="0" b="0"/>
+          </a:effectRef>
+          <a:fontRef idx="minor"/>
+        </p:style>
+        <p:txBody>
+          <a:bodyPr lIns="0" tIns="0" rIns="0" bIns="0"/>
+          <a:lstStyle/>
+          <a:p>
+            <a:pPr>
+              <a:lnSpc>
+                <a:spcPct val="100000"/>
+              </a:lnSpc>
+            </a:pPr>
+            <a:r>
+              <a:rPr lang="en-GB" sz="2800" b="1" spc="-1" noProof="0">
+                <a:solidFill>
+                  <a:srgbClr val="000000"/>
+                </a:solidFill>
+                <a:latin typeface="Arial"/>
+              </a:rPr>
+              <a:t>Research Questions </a:t>
+            </a:r>
+            <a:endParaRPr lang="en-GB" sz="2800" b="0" strike="noStrike" spc="-1" noProof="0">
+              <a:latin typeface="Arial"/>
+            </a:endParaRPr>
+          </a:p>
+        </p:txBody>
+      </p:sp>
+    </p:spTree>
+    <p:extLst>
+      <p:ext uri="{BB962C8B-B14F-4D97-AF65-F5344CB8AC3E}">
+        <p14:creationId xmlns:p14="http://schemas.microsoft.com/office/powerpoint/2010/main" val="3269156697"/>
       </p:ext>
     </p:extLst>
   </p:cSld>
